--- a/docs/superior_arch_cio.pptx
+++ b/docs/superior_arch_cio.pptx
@@ -7337,7 +7337,7 @@
         <p:spPr>
           <a:xfrm>
             <a:off x="10931652" y="1105418"/>
-            <a:ext cx="932688" cy="140818"/>
+            <a:ext cx="2029968" cy="140818"/>
           </a:xfrm>
           <a:prstGeom prst="rect">
             <a:avLst/>
@@ -7345,7 +7345,7 @@
           <a:noFill/>
         </p:spPr>
         <p:txBody>
-          <a:bodyPr wrap="square" lIns="0" rIns="0" tIns="0" bIns="0" anchor="ctr"/>
+          <a:bodyPr wrap="none" lIns="0" rIns="0" tIns="0" bIns="0" anchor="ctr"/>
           <a:lstStyle/>
           <a:p>
             <a:pPr algn="l">
@@ -7383,7 +7383,7 @@
         <p:spPr>
           <a:xfrm>
             <a:off x="10931652" y="1273668"/>
-            <a:ext cx="932688" cy="140818"/>
+            <a:ext cx="2029968" cy="140818"/>
           </a:xfrm>
           <a:prstGeom prst="rect">
             <a:avLst/>
@@ -7391,7 +7391,7 @@
           <a:noFill/>
         </p:spPr>
         <p:txBody>
-          <a:bodyPr wrap="square" lIns="0" rIns="0" tIns="0" bIns="0" anchor="ctr"/>
+          <a:bodyPr wrap="none" lIns="0" rIns="0" tIns="0" bIns="0" anchor="ctr"/>
           <a:lstStyle/>
           <a:p>
             <a:pPr algn="l">
@@ -7429,7 +7429,7 @@
         <p:spPr>
           <a:xfrm>
             <a:off x="10931652" y="1441917"/>
-            <a:ext cx="932688" cy="140818"/>
+            <a:ext cx="2029968" cy="140818"/>
           </a:xfrm>
           <a:prstGeom prst="rect">
             <a:avLst/>
@@ -7437,7 +7437,7 @@
           <a:noFill/>
         </p:spPr>
         <p:txBody>
-          <a:bodyPr wrap="square" lIns="0" rIns="0" tIns="0" bIns="0" anchor="ctr"/>
+          <a:bodyPr wrap="none" lIns="0" rIns="0" tIns="0" bIns="0" anchor="ctr"/>
           <a:lstStyle/>
           <a:p>
             <a:pPr algn="l">
@@ -7475,7 +7475,7 @@
         <p:spPr>
           <a:xfrm>
             <a:off x="10931652" y="1610167"/>
-            <a:ext cx="932688" cy="140818"/>
+            <a:ext cx="2029968" cy="140818"/>
           </a:xfrm>
           <a:prstGeom prst="rect">
             <a:avLst/>
@@ -7483,7 +7483,7 @@
           <a:noFill/>
         </p:spPr>
         <p:txBody>
-          <a:bodyPr wrap="square" lIns="0" rIns="0" tIns="0" bIns="0" anchor="ctr"/>
+          <a:bodyPr wrap="none" lIns="0" rIns="0" tIns="0" bIns="0" anchor="ctr"/>
           <a:lstStyle/>
           <a:p>
             <a:pPr algn="l">
@@ -7521,7 +7521,7 @@
         <p:spPr>
           <a:xfrm>
             <a:off x="484632" y="171450"/>
-            <a:ext cx="488838" cy="109728"/>
+            <a:ext cx="2683398" cy="109728"/>
           </a:xfrm>
           <a:prstGeom prst="rect">
             <a:avLst/>
@@ -7529,7 +7529,7 @@
           <a:noFill/>
         </p:spPr>
         <p:txBody>
-          <a:bodyPr wrap="square" lIns="0" rIns="0" tIns="0" bIns="0" anchor="ctr"/>
+          <a:bodyPr wrap="none" lIns="0" rIns="0" tIns="0" bIns="0" anchor="ctr"/>
           <a:lstStyle/>
           <a:p>
             <a:pPr algn="l">
@@ -7558,7 +7558,7 @@
         <p:spPr>
           <a:xfrm>
             <a:off x="484632" y="290322"/>
-            <a:ext cx="488838" cy="68580"/>
+            <a:ext cx="2683398" cy="68580"/>
           </a:xfrm>
           <a:prstGeom prst="rect">
             <a:avLst/>
@@ -7566,7 +7566,7 @@
           <a:noFill/>
         </p:spPr>
         <p:txBody>
-          <a:bodyPr wrap="square" lIns="0" rIns="0" tIns="0" bIns="0" anchor="ctr"/>
+          <a:bodyPr wrap="none" lIns="0" rIns="0" tIns="0" bIns="0" anchor="ctr"/>
           <a:lstStyle/>
           <a:p>
             <a:pPr algn="l">
@@ -7595,7 +7595,7 @@
         <p:spPr>
           <a:xfrm>
             <a:off x="333756" y="1157173"/>
-            <a:ext cx="1229868" cy="134417"/>
+            <a:ext cx="3424428" cy="134417"/>
           </a:xfrm>
           <a:prstGeom prst="rect">
             <a:avLst/>
@@ -7603,7 +7603,7 @@
           <a:noFill/>
         </p:spPr>
         <p:txBody>
-          <a:bodyPr wrap="square" lIns="0" rIns="0" tIns="0" bIns="0" anchor="ctr"/>
+          <a:bodyPr wrap="none" lIns="0" rIns="0" tIns="0" bIns="0" anchor="ctr"/>
           <a:lstStyle/>
           <a:p>
             <a:pPr algn="l">
@@ -7669,7 +7669,7 @@
         <p:spPr>
           <a:xfrm>
             <a:off x="1874520" y="1217798"/>
-            <a:ext cx="1996867" cy="120061"/>
+            <a:ext cx="4191427" cy="120061"/>
           </a:xfrm>
           <a:prstGeom prst="rect">
             <a:avLst/>
@@ -7677,7 +7677,7 @@
           <a:noFill/>
         </p:spPr>
         <p:txBody>
-          <a:bodyPr wrap="square" lIns="0" rIns="0" tIns="0" bIns="0" anchor="ctr"/>
+          <a:bodyPr wrap="none" lIns="0" rIns="0" tIns="0" bIns="0" anchor="ctr"/>
           <a:lstStyle/>
           <a:p>
             <a:pPr algn="l">
@@ -7706,7 +7706,7 @@
         <p:spPr>
           <a:xfrm>
             <a:off x="1874520" y="1356055"/>
-            <a:ext cx="1996867" cy="106985"/>
+            <a:ext cx="4191427" cy="106985"/>
           </a:xfrm>
           <a:prstGeom prst="rect">
             <a:avLst/>
@@ -7714,7 +7714,7 @@
           <a:noFill/>
         </p:spPr>
         <p:txBody>
-          <a:bodyPr wrap="square" lIns="0" rIns="0" tIns="0" bIns="0" anchor="ctr"/>
+          <a:bodyPr wrap="none" lIns="0" rIns="0" tIns="0" bIns="0" anchor="ctr"/>
           <a:lstStyle/>
           <a:p>
             <a:pPr algn="l">
@@ -7743,7 +7743,7 @@
         <p:spPr>
           <a:xfrm>
             <a:off x="4127419" y="1217798"/>
-            <a:ext cx="1996867" cy="120061"/>
+            <a:ext cx="4191427" cy="120061"/>
           </a:xfrm>
           <a:prstGeom prst="rect">
             <a:avLst/>
@@ -7751,7 +7751,7 @@
           <a:noFill/>
         </p:spPr>
         <p:txBody>
-          <a:bodyPr wrap="square" lIns="0" rIns="0" tIns="0" bIns="0" anchor="ctr"/>
+          <a:bodyPr wrap="none" lIns="0" rIns="0" tIns="0" bIns="0" anchor="ctr"/>
           <a:lstStyle/>
           <a:p>
             <a:pPr algn="l">
@@ -7780,7 +7780,7 @@
         <p:spPr>
           <a:xfrm>
             <a:off x="4127419" y="1356055"/>
-            <a:ext cx="1996867" cy="106985"/>
+            <a:ext cx="4191427" cy="106985"/>
           </a:xfrm>
           <a:prstGeom prst="rect">
             <a:avLst/>
@@ -7788,7 +7788,7 @@
           <a:noFill/>
         </p:spPr>
         <p:txBody>
-          <a:bodyPr wrap="square" lIns="0" rIns="0" tIns="0" bIns="0" anchor="ctr"/>
+          <a:bodyPr wrap="none" lIns="0" rIns="0" tIns="0" bIns="0" anchor="ctr"/>
           <a:lstStyle/>
           <a:p>
             <a:pPr algn="l">
@@ -7817,7 +7817,7 @@
         <p:spPr>
           <a:xfrm>
             <a:off x="6380226" y="1217798"/>
-            <a:ext cx="1996867" cy="120061"/>
+            <a:ext cx="4191427" cy="120061"/>
           </a:xfrm>
           <a:prstGeom prst="rect">
             <a:avLst/>
@@ -7825,7 +7825,7 @@
           <a:noFill/>
         </p:spPr>
         <p:txBody>
-          <a:bodyPr wrap="square" lIns="0" rIns="0" tIns="0" bIns="0" anchor="ctr"/>
+          <a:bodyPr wrap="none" lIns="0" rIns="0" tIns="0" bIns="0" anchor="ctr"/>
           <a:lstStyle/>
           <a:p>
             <a:pPr algn="l">
@@ -7854,7 +7854,7 @@
         <p:spPr>
           <a:xfrm>
             <a:off x="6380226" y="1356055"/>
-            <a:ext cx="1996867" cy="106985"/>
+            <a:ext cx="4191427" cy="106985"/>
           </a:xfrm>
           <a:prstGeom prst="rect">
             <a:avLst/>
@@ -7862,7 +7862,7 @@
           <a:noFill/>
         </p:spPr>
         <p:txBody>
-          <a:bodyPr wrap="square" lIns="0" rIns="0" tIns="0" bIns="0" anchor="ctr"/>
+          <a:bodyPr wrap="none" lIns="0" rIns="0" tIns="0" bIns="0" anchor="ctr"/>
           <a:lstStyle/>
           <a:p>
             <a:pPr algn="l">
@@ -7891,7 +7891,7 @@
         <p:spPr>
           <a:xfrm>
             <a:off x="8633125" y="1217798"/>
-            <a:ext cx="1996867" cy="120061"/>
+            <a:ext cx="4191427" cy="120061"/>
           </a:xfrm>
           <a:prstGeom prst="rect">
             <a:avLst/>
@@ -7899,7 +7899,7 @@
           <a:noFill/>
         </p:spPr>
         <p:txBody>
-          <a:bodyPr wrap="square" lIns="0" rIns="0" tIns="0" bIns="0" anchor="ctr"/>
+          <a:bodyPr wrap="none" lIns="0" rIns="0" tIns="0" bIns="0" anchor="ctr"/>
           <a:lstStyle/>
           <a:p>
             <a:pPr algn="l">
@@ -7928,7 +7928,7 @@
         <p:spPr>
           <a:xfrm>
             <a:off x="8633125" y="1356055"/>
-            <a:ext cx="1996867" cy="106985"/>
+            <a:ext cx="4191427" cy="106985"/>
           </a:xfrm>
           <a:prstGeom prst="rect">
             <a:avLst/>
@@ -7936,7 +7936,7 @@
           <a:noFill/>
         </p:spPr>
         <p:txBody>
-          <a:bodyPr wrap="square" lIns="0" rIns="0" tIns="0" bIns="0" anchor="ctr"/>
+          <a:bodyPr wrap="none" lIns="0" rIns="0" tIns="0" bIns="0" anchor="ctr"/>
           <a:lstStyle/>
           <a:p>
             <a:pPr algn="l">
@@ -7965,7 +7965,7 @@
         <p:spPr>
           <a:xfrm>
             <a:off x="10931652" y="929945"/>
-            <a:ext cx="932688" cy="138989"/>
+            <a:ext cx="3127248" cy="138989"/>
           </a:xfrm>
           <a:prstGeom prst="rect">
             <a:avLst/>
@@ -7973,7 +7973,7 @@
           <a:noFill/>
         </p:spPr>
         <p:txBody>
-          <a:bodyPr wrap="square" lIns="0" rIns="0" tIns="0" bIns="0" anchor="ctr"/>
+          <a:bodyPr wrap="none" lIns="0" rIns="0" tIns="0" bIns="0" anchor="ctr"/>
           <a:lstStyle/>
           <a:p>
             <a:pPr algn="l">
@@ -8002,7 +8002,7 @@
         <p:spPr>
           <a:xfrm>
             <a:off x="333756" y="2014698"/>
-            <a:ext cx="1229868" cy="134417"/>
+            <a:ext cx="3424428" cy="134417"/>
           </a:xfrm>
           <a:prstGeom prst="rect">
             <a:avLst/>
@@ -8010,7 +8010,7 @@
           <a:noFill/>
         </p:spPr>
         <p:txBody>
-          <a:bodyPr wrap="square" lIns="0" rIns="0" tIns="0" bIns="0" anchor="ctr"/>
+          <a:bodyPr wrap="none" lIns="0" rIns="0" tIns="0" bIns="0" anchor="ctr"/>
           <a:lstStyle/>
           <a:p>
             <a:pPr algn="l">
@@ -8039,7 +8039,7 @@
         <p:spPr>
           <a:xfrm>
             <a:off x="333756" y="2167311"/>
-            <a:ext cx="1229868" cy="106985"/>
+            <a:ext cx="3424428" cy="106985"/>
           </a:xfrm>
           <a:prstGeom prst="rect">
             <a:avLst/>
@@ -8047,7 +8047,7 @@
           <a:noFill/>
         </p:spPr>
         <p:txBody>
-          <a:bodyPr wrap="square" lIns="0" rIns="0" tIns="0" bIns="0" anchor="ctr"/>
+          <a:bodyPr wrap="none" lIns="0" rIns="0" tIns="0" bIns="0" anchor="ctr"/>
           <a:lstStyle/>
           <a:p>
             <a:pPr algn="l">
@@ -8076,7 +8076,7 @@
         <p:spPr>
           <a:xfrm>
             <a:off x="2130552" y="1961205"/>
-            <a:ext cx="2491740" cy="134417"/>
+            <a:ext cx="4686300" cy="134417"/>
           </a:xfrm>
           <a:prstGeom prst="rect">
             <a:avLst/>
@@ -8084,7 +8084,7 @@
           <a:noFill/>
         </p:spPr>
         <p:txBody>
-          <a:bodyPr wrap="square" lIns="0" rIns="0" tIns="0" bIns="0" anchor="ctr"/>
+          <a:bodyPr wrap="none" lIns="0" rIns="0" tIns="0" bIns="0" anchor="ctr"/>
           <a:lstStyle/>
           <a:p>
             <a:pPr algn="l">
@@ -8113,7 +8113,7 @@
         <p:spPr>
           <a:xfrm>
             <a:off x="2681935" y="1964406"/>
-            <a:ext cx="238750" cy="128016"/>
+            <a:ext cx="2433310" cy="128016"/>
           </a:xfrm>
           <a:prstGeom prst="rect">
             <a:avLst/>
@@ -8121,7 +8121,7 @@
           <a:noFill/>
         </p:spPr>
         <p:txBody>
-          <a:bodyPr wrap="square" lIns="0" rIns="0" tIns="0" bIns="0" anchor="ctr"/>
+          <a:bodyPr wrap="none" lIns="0" rIns="0" tIns="0" bIns="0" anchor="ctr"/>
           <a:lstStyle/>
           <a:p>
             <a:pPr algn="l">
@@ -8187,7 +8187,7 @@
         <p:spPr>
           <a:xfrm>
             <a:off x="5134356" y="2014698"/>
-            <a:ext cx="1903506" cy="134417"/>
+            <a:ext cx="4098066" cy="134417"/>
           </a:xfrm>
           <a:prstGeom prst="rect">
             <a:avLst/>
@@ -8195,7 +8195,7 @@
           <a:noFill/>
         </p:spPr>
         <p:txBody>
-          <a:bodyPr wrap="square" lIns="0" rIns="0" tIns="0" bIns="0" anchor="ctr"/>
+          <a:bodyPr wrap="none" lIns="0" rIns="0" tIns="0" bIns="0" anchor="ctr"/>
           <a:lstStyle/>
           <a:p>
             <a:pPr algn="l">
@@ -8224,7 +8224,7 @@
         <p:spPr>
           <a:xfrm>
             <a:off x="5134356" y="2167311"/>
-            <a:ext cx="1903506" cy="106985"/>
+            <a:ext cx="4098066" cy="106985"/>
           </a:xfrm>
           <a:prstGeom prst="rect">
             <a:avLst/>
@@ -8232,7 +8232,7 @@
           <a:noFill/>
         </p:spPr>
         <p:txBody>
-          <a:bodyPr wrap="square" lIns="0" rIns="0" tIns="0" bIns="0" anchor="ctr"/>
+          <a:bodyPr wrap="none" lIns="0" rIns="0" tIns="0" bIns="0" anchor="ctr"/>
           <a:lstStyle/>
           <a:p>
             <a:pPr algn="l">
@@ -8261,7 +8261,7 @@
         <p:spPr>
           <a:xfrm>
             <a:off x="7882128" y="2014698"/>
-            <a:ext cx="2052005" cy="134417"/>
+            <a:ext cx="4246565" cy="134417"/>
           </a:xfrm>
           <a:prstGeom prst="rect">
             <a:avLst/>
@@ -8269,7 +8269,7 @@
           <a:noFill/>
         </p:spPr>
         <p:txBody>
-          <a:bodyPr wrap="square" lIns="0" rIns="0" tIns="0" bIns="0" anchor="ctr"/>
+          <a:bodyPr wrap="none" lIns="0" rIns="0" tIns="0" bIns="0" anchor="ctr"/>
           <a:lstStyle/>
           <a:p>
             <a:pPr algn="l">
@@ -8298,7 +8298,7 @@
         <p:spPr>
           <a:xfrm>
             <a:off x="7882128" y="2167311"/>
-            <a:ext cx="2052005" cy="106985"/>
+            <a:ext cx="4246565" cy="106985"/>
           </a:xfrm>
           <a:prstGeom prst="rect">
             <a:avLst/>
@@ -8306,7 +8306,7 @@
           <a:noFill/>
         </p:spPr>
         <p:txBody>
-          <a:bodyPr wrap="square" lIns="0" rIns="0" tIns="0" bIns="0" anchor="ctr"/>
+          <a:bodyPr wrap="none" lIns="0" rIns="0" tIns="0" bIns="0" anchor="ctr"/>
           <a:lstStyle/>
           <a:p>
             <a:pPr algn="l">
@@ -8335,7 +8335,7 @@
         <p:spPr>
           <a:xfrm>
             <a:off x="333756" y="2972623"/>
-            <a:ext cx="1229868" cy="134417"/>
+            <a:ext cx="3424428" cy="134417"/>
           </a:xfrm>
           <a:prstGeom prst="rect">
             <a:avLst/>
@@ -8343,7 +8343,7 @@
           <a:noFill/>
         </p:spPr>
         <p:txBody>
-          <a:bodyPr wrap="square" lIns="0" rIns="0" tIns="0" bIns="0" anchor="ctr"/>
+          <a:bodyPr wrap="none" lIns="0" rIns="0" tIns="0" bIns="0" anchor="ctr"/>
           <a:lstStyle/>
           <a:p>
             <a:pPr algn="l">
@@ -8409,7 +8409,7 @@
         <p:spPr>
           <a:xfrm>
             <a:off x="7150791" y="2620396"/>
-            <a:ext cx="3483681" cy="108814"/>
+            <a:ext cx="5678241" cy="108814"/>
           </a:xfrm>
           <a:prstGeom prst="rect">
             <a:avLst/>
@@ -8417,7 +8417,7 @@
           <a:noFill/>
         </p:spPr>
         <p:txBody>
-          <a:bodyPr wrap="square" lIns="0" rIns="0" tIns="0" bIns="0" anchor="ctr"/>
+          <a:bodyPr wrap="none" lIns="0" rIns="0" tIns="0" bIns="0" anchor="ctr"/>
           <a:lstStyle/>
           <a:p>
             <a:pPr algn="l">
@@ -8483,7 +8483,7 @@
         <p:spPr>
           <a:xfrm>
             <a:off x="7150791" y="3160989"/>
-            <a:ext cx="3483681" cy="108814"/>
+            <a:ext cx="5678241" cy="108814"/>
           </a:xfrm>
           <a:prstGeom prst="rect">
             <a:avLst/>
@@ -8491,7 +8491,7 @@
           <a:noFill/>
         </p:spPr>
         <p:txBody>
-          <a:bodyPr wrap="square" lIns="0" rIns="0" tIns="0" bIns="0" anchor="ctr"/>
+          <a:bodyPr wrap="none" lIns="0" rIns="0" tIns="0" bIns="0" anchor="ctr"/>
           <a:lstStyle/>
           <a:p>
             <a:pPr algn="l">
@@ -8557,7 +8557,7 @@
         <p:spPr>
           <a:xfrm>
             <a:off x="7059351" y="3646627"/>
-            <a:ext cx="3666561" cy="108814"/>
+            <a:ext cx="5861121" cy="108814"/>
           </a:xfrm>
           <a:prstGeom prst="rect">
             <a:avLst/>
@@ -8565,7 +8565,7 @@
           <a:noFill/>
         </p:spPr>
         <p:txBody>
-          <a:bodyPr wrap="square" lIns="0" rIns="0" tIns="0" bIns="0" anchor="ctr"/>
+          <a:bodyPr wrap="none" lIns="0" rIns="0" tIns="0" bIns="0" anchor="ctr"/>
           <a:lstStyle/>
           <a:p>
             <a:pPr algn="l">
@@ -8594,7 +8594,7 @@
         <p:spPr>
           <a:xfrm>
             <a:off x="333756" y="4043477"/>
-            <a:ext cx="1229868" cy="134417"/>
+            <a:ext cx="3424428" cy="134417"/>
           </a:xfrm>
           <a:prstGeom prst="rect">
             <a:avLst/>
@@ -8602,7 +8602,7 @@
           <a:noFill/>
         </p:spPr>
         <p:txBody>
-          <a:bodyPr wrap="square" lIns="0" rIns="0" tIns="0" bIns="0" anchor="ctr"/>
+          <a:bodyPr wrap="none" lIns="0" rIns="0" tIns="0" bIns="0" anchor="ctr"/>
           <a:lstStyle/>
           <a:p>
             <a:pPr algn="l">
@@ -8631,7 +8631,7 @@
         <p:spPr>
           <a:xfrm>
             <a:off x="333756" y="4196182"/>
-            <a:ext cx="1229868" cy="106985"/>
+            <a:ext cx="3424428" cy="106985"/>
           </a:xfrm>
           <a:prstGeom prst="rect">
             <a:avLst/>
@@ -8639,7 +8639,7 @@
           <a:noFill/>
         </p:spPr>
         <p:txBody>
-          <a:bodyPr wrap="square" lIns="0" rIns="0" tIns="0" bIns="0" anchor="ctr"/>
+          <a:bodyPr wrap="none" lIns="0" rIns="0" tIns="0" bIns="0" anchor="ctr"/>
           <a:lstStyle/>
           <a:p>
             <a:pPr algn="l">
@@ -8668,7 +8668,7 @@
         <p:spPr>
           <a:xfrm>
             <a:off x="1874520" y="3993185"/>
-            <a:ext cx="1546159" cy="128016"/>
+            <a:ext cx="3740719" cy="128016"/>
           </a:xfrm>
           <a:prstGeom prst="rect">
             <a:avLst/>
@@ -8676,7 +8676,7 @@
           <a:noFill/>
         </p:spPr>
         <p:txBody>
-          <a:bodyPr wrap="square" lIns="0" rIns="0" tIns="0" bIns="0" anchor="ctr"/>
+          <a:bodyPr wrap="none" lIns="0" rIns="0" tIns="0" bIns="0" anchor="ctr"/>
           <a:lstStyle/>
           <a:p>
             <a:pPr algn="l">
@@ -8705,7 +8705,7 @@
         <p:spPr>
           <a:xfrm>
             <a:off x="3154223" y="3993185"/>
-            <a:ext cx="238750" cy="128016"/>
+            <a:ext cx="2433310" cy="128016"/>
           </a:xfrm>
           <a:prstGeom prst="rect">
             <a:avLst/>
@@ -8713,7 +8713,7 @@
           <a:noFill/>
         </p:spPr>
         <p:txBody>
-          <a:bodyPr wrap="square" lIns="0" rIns="0" tIns="0" bIns="0" anchor="ctr"/>
+          <a:bodyPr wrap="none" lIns="0" rIns="0" tIns="0" bIns="0" anchor="ctr"/>
           <a:lstStyle/>
           <a:p>
             <a:pPr algn="l">
@@ -8779,7 +8779,7 @@
         <p:spPr>
           <a:xfrm>
             <a:off x="3676711" y="3999677"/>
-            <a:ext cx="1546250" cy="115123"/>
+            <a:ext cx="3740810" cy="115123"/>
           </a:xfrm>
           <a:prstGeom prst="rect">
             <a:avLst/>
@@ -8787,7 +8787,7 @@
           <a:noFill/>
         </p:spPr>
         <p:txBody>
-          <a:bodyPr wrap="square" lIns="0" rIns="0" tIns="0" bIns="0" anchor="ctr"/>
+          <a:bodyPr wrap="none" lIns="0" rIns="0" tIns="0" bIns="0" anchor="ctr"/>
           <a:lstStyle/>
           <a:p>
             <a:pPr algn="l">
@@ -8853,7 +8853,7 @@
         <p:spPr>
           <a:xfrm>
             <a:off x="5479085" y="3999677"/>
-            <a:ext cx="1546250" cy="115123"/>
+            <a:ext cx="3740810" cy="115123"/>
           </a:xfrm>
           <a:prstGeom prst="rect">
             <a:avLst/>
@@ -8861,7 +8861,7 @@
           <a:noFill/>
         </p:spPr>
         <p:txBody>
-          <a:bodyPr wrap="square" lIns="0" rIns="0" tIns="0" bIns="0" anchor="ctr"/>
+          <a:bodyPr wrap="none" lIns="0" rIns="0" tIns="0" bIns="0" anchor="ctr"/>
           <a:lstStyle/>
           <a:p>
             <a:pPr algn="l">
@@ -8927,7 +8927,7 @@
         <p:spPr>
           <a:xfrm>
             <a:off x="7281367" y="3999677"/>
-            <a:ext cx="1546250" cy="115123"/>
+            <a:ext cx="3740810" cy="115123"/>
           </a:xfrm>
           <a:prstGeom prst="rect">
             <a:avLst/>
@@ -8935,7 +8935,7 @@
           <a:noFill/>
         </p:spPr>
         <p:txBody>
-          <a:bodyPr wrap="square" lIns="0" rIns="0" tIns="0" bIns="0" anchor="ctr"/>
+          <a:bodyPr wrap="none" lIns="0" rIns="0" tIns="0" bIns="0" anchor="ctr"/>
           <a:lstStyle/>
           <a:p>
             <a:pPr algn="l">
@@ -9001,7 +9001,7 @@
         <p:spPr>
           <a:xfrm>
             <a:off x="9083650" y="3999677"/>
-            <a:ext cx="1546250" cy="115123"/>
+            <a:ext cx="3740810" cy="115123"/>
           </a:xfrm>
           <a:prstGeom prst="rect">
             <a:avLst/>
@@ -9009,7 +9009,7 @@
           <a:noFill/>
         </p:spPr>
         <p:txBody>
-          <a:bodyPr wrap="square" lIns="0" rIns="0" tIns="0" bIns="0" anchor="ctr"/>
+          <a:bodyPr wrap="none" lIns="0" rIns="0" tIns="0" bIns="0" anchor="ctr"/>
           <a:lstStyle/>
           <a:p>
             <a:pPr algn="l">
@@ -9075,7 +9075,7 @@
         <p:spPr>
           <a:xfrm>
             <a:off x="333756" y="4650547"/>
-            <a:ext cx="1229868" cy="134417"/>
+            <a:ext cx="3424428" cy="134417"/>
           </a:xfrm>
           <a:prstGeom prst="rect">
             <a:avLst/>
@@ -9083,7 +9083,7 @@
           <a:noFill/>
         </p:spPr>
         <p:txBody>
-          <a:bodyPr wrap="square" lIns="0" rIns="0" tIns="0" bIns="0" anchor="ctr"/>
+          <a:bodyPr wrap="none" lIns="0" rIns="0" tIns="0" bIns="0" anchor="ctr"/>
           <a:lstStyle/>
           <a:p>
             <a:pPr algn="l">
@@ -9112,7 +9112,7 @@
         <p:spPr>
           <a:xfrm>
             <a:off x="333756" y="4803252"/>
-            <a:ext cx="1229868" cy="106985"/>
+            <a:ext cx="3424428" cy="106985"/>
           </a:xfrm>
           <a:prstGeom prst="rect">
             <a:avLst/>
@@ -9120,7 +9120,7 @@
           <a:noFill/>
         </p:spPr>
         <p:txBody>
-          <a:bodyPr wrap="square" lIns="0" rIns="0" tIns="0" bIns="0" anchor="ctr"/>
+          <a:bodyPr wrap="none" lIns="0" rIns="0" tIns="0" bIns="0" anchor="ctr"/>
           <a:lstStyle/>
           <a:p>
             <a:pPr algn="l">
@@ -9149,7 +9149,7 @@
         <p:spPr>
           <a:xfrm>
             <a:off x="2103120" y="4650547"/>
-            <a:ext cx="1772199" cy="134417"/>
+            <a:ext cx="3966759" cy="134417"/>
           </a:xfrm>
           <a:prstGeom prst="rect">
             <a:avLst/>
@@ -9157,7 +9157,7 @@
           <a:noFill/>
         </p:spPr>
         <p:txBody>
-          <a:bodyPr wrap="square" lIns="0" rIns="0" tIns="0" bIns="0" anchor="ctr"/>
+          <a:bodyPr wrap="none" lIns="0" rIns="0" tIns="0" bIns="0" anchor="ctr"/>
           <a:lstStyle/>
           <a:p>
             <a:pPr algn="l">
@@ -9186,7 +9186,7 @@
         <p:spPr>
           <a:xfrm>
             <a:off x="2103120" y="4803252"/>
-            <a:ext cx="1772199" cy="106985"/>
+            <a:ext cx="3966759" cy="106985"/>
           </a:xfrm>
           <a:prstGeom prst="rect">
             <a:avLst/>
@@ -9194,7 +9194,7 @@
           <a:noFill/>
         </p:spPr>
         <p:txBody>
-          <a:bodyPr wrap="square" lIns="0" rIns="0" tIns="0" bIns="0" anchor="ctr"/>
+          <a:bodyPr wrap="none" lIns="0" rIns="0" tIns="0" bIns="0" anchor="ctr"/>
           <a:lstStyle/>
           <a:p>
             <a:pPr algn="l">
@@ -9223,7 +9223,7 @@
         <p:spPr>
           <a:xfrm>
             <a:off x="4878324" y="4650547"/>
-            <a:ext cx="2087758" cy="134417"/>
+            <a:ext cx="4282318" cy="134417"/>
           </a:xfrm>
           <a:prstGeom prst="rect">
             <a:avLst/>
@@ -9231,7 +9231,7 @@
           <a:noFill/>
         </p:spPr>
         <p:txBody>
-          <a:bodyPr wrap="square" lIns="0" rIns="0" tIns="0" bIns="0" anchor="ctr"/>
+          <a:bodyPr wrap="none" lIns="0" rIns="0" tIns="0" bIns="0" anchor="ctr"/>
           <a:lstStyle/>
           <a:p>
             <a:pPr algn="l">
@@ -9260,7 +9260,7 @@
         <p:spPr>
           <a:xfrm>
             <a:off x="4878324" y="4803252"/>
-            <a:ext cx="2087758" cy="106985"/>
+            <a:ext cx="4282318" cy="106985"/>
           </a:xfrm>
           <a:prstGeom prst="rect">
             <a:avLst/>
@@ -9268,7 +9268,7 @@
           <a:noFill/>
         </p:spPr>
         <p:txBody>
-          <a:bodyPr wrap="square" lIns="0" rIns="0" tIns="0" bIns="0" anchor="ctr"/>
+          <a:bodyPr wrap="none" lIns="0" rIns="0" tIns="0" bIns="0" anchor="ctr"/>
           <a:lstStyle/>
           <a:p>
             <a:pPr algn="l">
@@ -9297,7 +9297,7 @@
         <p:spPr>
           <a:xfrm>
             <a:off x="7882128" y="4650547"/>
-            <a:ext cx="2117750" cy="134417"/>
+            <a:ext cx="4312310" cy="134417"/>
           </a:xfrm>
           <a:prstGeom prst="rect">
             <a:avLst/>
@@ -9305,7 +9305,7 @@
           <a:noFill/>
         </p:spPr>
         <p:txBody>
-          <a:bodyPr wrap="square" lIns="0" rIns="0" tIns="0" bIns="0" anchor="ctr"/>
+          <a:bodyPr wrap="none" lIns="0" rIns="0" tIns="0" bIns="0" anchor="ctr"/>
           <a:lstStyle/>
           <a:p>
             <a:pPr algn="l">
@@ -9334,7 +9334,7 @@
         <p:spPr>
           <a:xfrm>
             <a:off x="7882128" y="4803252"/>
-            <a:ext cx="2117750" cy="106985"/>
+            <a:ext cx="4312310" cy="106985"/>
           </a:xfrm>
           <a:prstGeom prst="rect">
             <a:avLst/>
@@ -9342,7 +9342,7 @@
           <a:noFill/>
         </p:spPr>
         <p:txBody>
-          <a:bodyPr wrap="square" lIns="0" rIns="0" tIns="0" bIns="0" anchor="ctr"/>
+          <a:bodyPr wrap="none" lIns="0" rIns="0" tIns="0" bIns="0" anchor="ctr"/>
           <a:lstStyle/>
           <a:p>
             <a:pPr algn="l">
@@ -9371,7 +9371,7 @@
         <p:spPr>
           <a:xfrm>
             <a:off x="333756" y="5398892"/>
-            <a:ext cx="1229868" cy="134417"/>
+            <a:ext cx="3424428" cy="134417"/>
           </a:xfrm>
           <a:prstGeom prst="rect">
             <a:avLst/>
@@ -9379,7 +9379,7 @@
           <a:noFill/>
         </p:spPr>
         <p:txBody>
-          <a:bodyPr wrap="square" lIns="0" rIns="0" tIns="0" bIns="0" anchor="ctr"/>
+          <a:bodyPr wrap="none" lIns="0" rIns="0" tIns="0" bIns="0" anchor="ctr"/>
           <a:lstStyle/>
           <a:p>
             <a:pPr algn="l">
@@ -9408,7 +9408,7 @@
         <p:spPr>
           <a:xfrm>
             <a:off x="333756" y="5551597"/>
-            <a:ext cx="1229868" cy="106985"/>
+            <a:ext cx="3424428" cy="106985"/>
           </a:xfrm>
           <a:prstGeom prst="rect">
             <a:avLst/>
@@ -9416,7 +9416,7 @@
           <a:noFill/>
         </p:spPr>
         <p:txBody>
-          <a:bodyPr wrap="square" lIns="0" rIns="0" tIns="0" bIns="0" anchor="ctr"/>
+          <a:bodyPr wrap="none" lIns="0" rIns="0" tIns="0" bIns="0" anchor="ctr"/>
           <a:lstStyle/>
           <a:p>
             <a:pPr algn="l">
@@ -9444,8 +9444,8 @@
         </p:nvSpPr>
         <p:spPr>
           <a:xfrm>
-            <a:off x="1874520" y="5207325"/>
-            <a:ext cx="4121658" cy="137160"/>
+            <a:off x="2066544" y="5207325"/>
+            <a:ext cx="6124194" cy="137160"/>
           </a:xfrm>
           <a:prstGeom prst="rect">
             <a:avLst/>
@@ -9453,7 +9453,7 @@
           <a:noFill/>
         </p:spPr>
         <p:txBody>
-          <a:bodyPr wrap="square" lIns="0" rIns="0" tIns="0" bIns="0" anchor="ctr"/>
+          <a:bodyPr wrap="none" lIns="0" rIns="0" tIns="0" bIns="0" anchor="ctr"/>
           <a:lstStyle/>
           <a:p>
             <a:pPr algn="l">
@@ -9482,7 +9482,7 @@
         <p:spPr>
           <a:xfrm>
             <a:off x="2998409" y="5211897"/>
-            <a:ext cx="238750" cy="128016"/>
+            <a:ext cx="2433310" cy="128016"/>
           </a:xfrm>
           <a:prstGeom prst="rect">
             <a:avLst/>
@@ -9490,7 +9490,7 @@
           <a:noFill/>
         </p:spPr>
         <p:txBody>
-          <a:bodyPr wrap="square" lIns="0" rIns="0" tIns="0" bIns="0" anchor="ctr"/>
+          <a:bodyPr wrap="none" lIns="0" rIns="0" tIns="0" bIns="0" anchor="ctr"/>
           <a:lstStyle/>
           <a:p>
             <a:pPr algn="l">
@@ -9519,7 +9519,7 @@
         <p:spPr>
           <a:xfrm>
             <a:off x="1874520" y="5381061"/>
-            <a:ext cx="380299" cy="145390"/>
+            <a:ext cx="2574859" cy="145390"/>
           </a:xfrm>
           <a:prstGeom prst="rect">
             <a:avLst/>
@@ -9527,7 +9527,7 @@
           <a:noFill/>
         </p:spPr>
         <p:txBody>
-          <a:bodyPr wrap="square" lIns="0" rIns="0" tIns="0" bIns="0" anchor="ctr"/>
+          <a:bodyPr wrap="none" lIns="0" rIns="0" tIns="0" bIns="0" anchor="ctr"/>
           <a:lstStyle/>
           <a:p>
             <a:pPr algn="l">
@@ -9556,7 +9556,7 @@
         <p:spPr>
           <a:xfrm>
             <a:off x="2282251" y="5399349"/>
-            <a:ext cx="72146" cy="108814"/>
+            <a:ext cx="2266706" cy="108814"/>
           </a:xfrm>
           <a:prstGeom prst="rect">
             <a:avLst/>
@@ -9564,7 +9564,7 @@
           <a:noFill/>
         </p:spPr>
         <p:txBody>
-          <a:bodyPr wrap="square" lIns="0" rIns="0" tIns="0" bIns="0" anchor="ctr"/>
+          <a:bodyPr wrap="none" lIns="0" rIns="0" tIns="0" bIns="0" anchor="ctr"/>
           <a:lstStyle/>
           <a:p>
             <a:pPr algn="l">
@@ -9593,7 +9593,7 @@
         <p:spPr>
           <a:xfrm>
             <a:off x="2381829" y="5381061"/>
-            <a:ext cx="325435" cy="145390"/>
+            <a:ext cx="2519995" cy="145390"/>
           </a:xfrm>
           <a:prstGeom prst="rect">
             <a:avLst/>
@@ -9601,7 +9601,7 @@
           <a:noFill/>
         </p:spPr>
         <p:txBody>
-          <a:bodyPr wrap="square" lIns="0" rIns="0" tIns="0" bIns="0" anchor="ctr"/>
+          <a:bodyPr wrap="none" lIns="0" rIns="0" tIns="0" bIns="0" anchor="ctr"/>
           <a:lstStyle/>
           <a:p>
             <a:pPr algn="l">
@@ -9630,7 +9630,7 @@
         <p:spPr>
           <a:xfrm>
             <a:off x="2734788" y="5399349"/>
-            <a:ext cx="72146" cy="108814"/>
+            <a:ext cx="2266706" cy="108814"/>
           </a:xfrm>
           <a:prstGeom prst="rect">
             <a:avLst/>
@@ -9638,7 +9638,7 @@
           <a:noFill/>
         </p:spPr>
         <p:txBody>
-          <a:bodyPr wrap="square" lIns="0" rIns="0" tIns="0" bIns="0" anchor="ctr"/>
+          <a:bodyPr wrap="none" lIns="0" rIns="0" tIns="0" bIns="0" anchor="ctr"/>
           <a:lstStyle/>
           <a:p>
             <a:pPr algn="l">
@@ -9667,7 +9667,7 @@
         <p:spPr>
           <a:xfrm>
             <a:off x="2834366" y="5381061"/>
-            <a:ext cx="287030" cy="145390"/>
+            <a:ext cx="2481590" cy="145390"/>
           </a:xfrm>
           <a:prstGeom prst="rect">
             <a:avLst/>
@@ -9675,7 +9675,7 @@
           <a:noFill/>
         </p:spPr>
         <p:txBody>
-          <a:bodyPr wrap="square" lIns="0" rIns="0" tIns="0" bIns="0" anchor="ctr"/>
+          <a:bodyPr wrap="none" lIns="0" rIns="0" tIns="0" bIns="0" anchor="ctr"/>
           <a:lstStyle/>
           <a:p>
             <a:pPr algn="l">
@@ -9704,7 +9704,7 @@
         <p:spPr>
           <a:xfrm>
             <a:off x="1874520" y="5563027"/>
-            <a:ext cx="574243" cy="129845"/>
+            <a:ext cx="2768803" cy="129845"/>
           </a:xfrm>
           <a:prstGeom prst="rect">
             <a:avLst/>
@@ -9712,7 +9712,7 @@
           <a:noFill/>
         </p:spPr>
         <p:txBody>
-          <a:bodyPr wrap="square" lIns="0" rIns="0" tIns="0" bIns="0" anchor="ctr"/>
+          <a:bodyPr wrap="none" lIns="0" rIns="0" tIns="0" bIns="0" anchor="ctr"/>
           <a:lstStyle/>
           <a:p>
             <a:pPr algn="l">
@@ -9741,7 +9741,7 @@
         <p:spPr>
           <a:xfrm>
             <a:off x="2476195" y="5563027"/>
-            <a:ext cx="530352" cy="129845"/>
+            <a:ext cx="2724912" cy="129845"/>
           </a:xfrm>
           <a:prstGeom prst="rect">
             <a:avLst/>
@@ -9749,7 +9749,7 @@
           <a:noFill/>
         </p:spPr>
         <p:txBody>
-          <a:bodyPr wrap="square" lIns="0" rIns="0" tIns="0" bIns="0" anchor="ctr"/>
+          <a:bodyPr wrap="none" lIns="0" rIns="0" tIns="0" bIns="0" anchor="ctr"/>
           <a:lstStyle/>
           <a:p>
             <a:pPr algn="l">
@@ -9778,7 +9778,7 @@
         <p:spPr>
           <a:xfrm>
             <a:off x="3033979" y="5563027"/>
-            <a:ext cx="969264" cy="129845"/>
+            <a:ext cx="3163824" cy="129845"/>
           </a:xfrm>
           <a:prstGeom prst="rect">
             <a:avLst/>
@@ -9786,7 +9786,7 @@
           <a:noFill/>
         </p:spPr>
         <p:txBody>
-          <a:bodyPr wrap="square" lIns="0" rIns="0" tIns="0" bIns="0" anchor="ctr"/>
+          <a:bodyPr wrap="none" lIns="0" rIns="0" tIns="0" bIns="0" anchor="ctr"/>
           <a:lstStyle/>
           <a:p>
             <a:pPr algn="l">
@@ -9815,7 +9815,7 @@
         <p:spPr>
           <a:xfrm>
             <a:off x="4030675" y="5563027"/>
-            <a:ext cx="618134" cy="129845"/>
+            <a:ext cx="2812694" cy="129845"/>
           </a:xfrm>
           <a:prstGeom prst="rect">
             <a:avLst/>
@@ -9823,7 +9823,7 @@
           <a:noFill/>
         </p:spPr>
         <p:txBody>
-          <a:bodyPr wrap="square" lIns="0" rIns="0" tIns="0" bIns="0" anchor="ctr"/>
+          <a:bodyPr wrap="none" lIns="0" rIns="0" tIns="0" bIns="0" anchor="ctr"/>
           <a:lstStyle/>
           <a:p>
             <a:pPr algn="l">
@@ -9852,7 +9852,7 @@
         <p:spPr>
           <a:xfrm>
             <a:off x="4676333" y="5563027"/>
-            <a:ext cx="398678" cy="129845"/>
+            <a:ext cx="2593238" cy="129845"/>
           </a:xfrm>
           <a:prstGeom prst="rect">
             <a:avLst/>
@@ -9860,7 +9860,7 @@
           <a:noFill/>
         </p:spPr>
         <p:txBody>
-          <a:bodyPr wrap="square" lIns="0" rIns="0" tIns="0" bIns="0" anchor="ctr"/>
+          <a:bodyPr wrap="none" lIns="0" rIns="0" tIns="0" bIns="0" anchor="ctr"/>
           <a:lstStyle/>
           <a:p>
             <a:pPr algn="l">
@@ -9889,7 +9889,7 @@
         <p:spPr>
           <a:xfrm>
             <a:off x="5102443" y="5563027"/>
-            <a:ext cx="442661" cy="129845"/>
+            <a:ext cx="2637221" cy="129845"/>
           </a:xfrm>
           <a:prstGeom prst="rect">
             <a:avLst/>
@@ -9897,7 +9897,7 @@
           <a:noFill/>
         </p:spPr>
         <p:txBody>
-          <a:bodyPr wrap="square" lIns="0" rIns="0" tIns="0" bIns="0" anchor="ctr"/>
+          <a:bodyPr wrap="none" lIns="0" rIns="0" tIns="0" bIns="0" anchor="ctr"/>
           <a:lstStyle/>
           <a:p>
             <a:pPr algn="l">
@@ -9926,7 +9926,7 @@
         <p:spPr>
           <a:xfrm>
             <a:off x="1874520" y="5720304"/>
-            <a:ext cx="662117" cy="129845"/>
+            <a:ext cx="2856677" cy="129845"/>
           </a:xfrm>
           <a:prstGeom prst="rect">
             <a:avLst/>
@@ -9934,7 +9934,7 @@
           <a:noFill/>
         </p:spPr>
         <p:txBody>
-          <a:bodyPr wrap="square" lIns="0" rIns="0" tIns="0" bIns="0" anchor="ctr"/>
+          <a:bodyPr wrap="none" lIns="0" rIns="0" tIns="0" bIns="0" anchor="ctr"/>
           <a:lstStyle/>
           <a:p>
             <a:pPr algn="l">
@@ -9963,7 +9963,7 @@
         <p:spPr>
           <a:xfrm>
             <a:off x="6252210" y="5207325"/>
-            <a:ext cx="2060875" cy="134417"/>
+            <a:ext cx="4255435" cy="134417"/>
           </a:xfrm>
           <a:prstGeom prst="rect">
             <a:avLst/>
@@ -9971,7 +9971,7 @@
           <a:noFill/>
         </p:spPr>
         <p:txBody>
-          <a:bodyPr wrap="square" lIns="0" rIns="0" tIns="0" bIns="0" anchor="ctr"/>
+          <a:bodyPr wrap="none" lIns="0" rIns="0" tIns="0" bIns="0" anchor="ctr"/>
           <a:lstStyle/>
           <a:p>
             <a:pPr algn="l">
@@ -10000,7 +10000,7 @@
         <p:spPr>
           <a:xfrm>
             <a:off x="6252210" y="5378318"/>
-            <a:ext cx="2060875" cy="106985"/>
+            <a:ext cx="4255435" cy="106985"/>
           </a:xfrm>
           <a:prstGeom prst="rect">
             <a:avLst/>
@@ -10008,7 +10008,7 @@
           <a:noFill/>
         </p:spPr>
         <p:txBody>
-          <a:bodyPr wrap="square" lIns="0" rIns="0" tIns="0" bIns="0" anchor="ctr"/>
+          <a:bodyPr wrap="none" lIns="0" rIns="0" tIns="0" bIns="0" anchor="ctr"/>
           <a:lstStyle/>
           <a:p>
             <a:pPr algn="l">
@@ -10037,7 +10037,7 @@
         <p:spPr>
           <a:xfrm>
             <a:off x="8569117" y="5207325"/>
-            <a:ext cx="2060875" cy="134417"/>
+            <a:ext cx="4255435" cy="134417"/>
           </a:xfrm>
           <a:prstGeom prst="rect">
             <a:avLst/>
@@ -10045,7 +10045,7 @@
           <a:noFill/>
         </p:spPr>
         <p:txBody>
-          <a:bodyPr wrap="square" lIns="0" rIns="0" tIns="0" bIns="0" anchor="ctr"/>
+          <a:bodyPr wrap="none" lIns="0" rIns="0" tIns="0" bIns="0" anchor="ctr"/>
           <a:lstStyle/>
           <a:p>
             <a:pPr algn="l">
@@ -10111,7 +10111,7 @@
         <p:spPr>
           <a:xfrm>
             <a:off x="333756" y="6150072"/>
-            <a:ext cx="1229868" cy="134417"/>
+            <a:ext cx="3424428" cy="134417"/>
           </a:xfrm>
           <a:prstGeom prst="rect">
             <a:avLst/>
@@ -10119,7 +10119,7 @@
           <a:noFill/>
         </p:spPr>
         <p:txBody>
-          <a:bodyPr wrap="square" lIns="0" rIns="0" tIns="0" bIns="0" anchor="ctr"/>
+          <a:bodyPr wrap="none" lIns="0" rIns="0" tIns="0" bIns="0" anchor="ctr"/>
           <a:lstStyle/>
           <a:p>
             <a:pPr algn="l">
@@ -10148,7 +10148,7 @@
         <p:spPr>
           <a:xfrm>
             <a:off x="333756" y="6302685"/>
-            <a:ext cx="1229868" cy="106985"/>
+            <a:ext cx="3424428" cy="106985"/>
           </a:xfrm>
           <a:prstGeom prst="rect">
             <a:avLst/>
@@ -10156,7 +10156,7 @@
           <a:noFill/>
         </p:spPr>
         <p:txBody>
-          <a:bodyPr wrap="square" lIns="0" rIns="0" tIns="0" bIns="0" anchor="ctr"/>
+          <a:bodyPr wrap="none" lIns="0" rIns="0" tIns="0" bIns="0" anchor="ctr"/>
           <a:lstStyle/>
           <a:p>
             <a:pPr algn="l">
@@ -10185,7 +10185,7 @@
         <p:spPr>
           <a:xfrm>
             <a:off x="1769364" y="6114318"/>
-            <a:ext cx="850941" cy="102413"/>
+            <a:ext cx="3045501" cy="102413"/>
           </a:xfrm>
           <a:prstGeom prst="rect">
             <a:avLst/>
@@ -10193,7 +10193,7 @@
           <a:noFill/>
         </p:spPr>
         <p:txBody>
-          <a:bodyPr wrap="square" lIns="0" rIns="0" tIns="0" bIns="0" anchor="ctr"/>
+          <a:bodyPr wrap="none" lIns="0" rIns="0" tIns="0" bIns="0" anchor="ctr"/>
           <a:lstStyle/>
           <a:p>
             <a:pPr algn="l">
@@ -10221,8 +10221,8 @@
         </p:nvSpPr>
         <p:spPr>
           <a:xfrm>
-            <a:off x="2656881" y="6069513"/>
-            <a:ext cx="959663" cy="192024"/>
+            <a:off x="2839761" y="6069513"/>
+            <a:ext cx="2971343" cy="192024"/>
           </a:xfrm>
           <a:prstGeom prst="rect">
             <a:avLst/>
@@ -10230,7 +10230,7 @@
           <a:noFill/>
         </p:spPr>
         <p:txBody>
-          <a:bodyPr wrap="square" lIns="0" rIns="0" tIns="0" bIns="0" anchor="ctr"/>
+          <a:bodyPr wrap="none" lIns="0" rIns="0" tIns="0" bIns="0" anchor="ctr"/>
           <a:lstStyle/>
           <a:p>
             <a:pPr algn="l">
@@ -10258,8 +10258,8 @@
         </p:nvSpPr>
         <p:spPr>
           <a:xfrm>
-            <a:off x="3653119" y="6069513"/>
-            <a:ext cx="1128735" cy="192024"/>
+            <a:off x="3835999" y="6069513"/>
+            <a:ext cx="3140415" cy="192024"/>
           </a:xfrm>
           <a:prstGeom prst="rect">
             <a:avLst/>
@@ -10267,7 +10267,7 @@
           <a:noFill/>
         </p:spPr>
         <p:txBody>
-          <a:bodyPr wrap="square" lIns="0" rIns="0" tIns="0" bIns="0" anchor="ctr"/>
+          <a:bodyPr wrap="none" lIns="0" rIns="0" tIns="0" bIns="0" anchor="ctr"/>
           <a:lstStyle/>
           <a:p>
             <a:pPr algn="l">
@@ -10295,8 +10295,8 @@
         </p:nvSpPr>
         <p:spPr>
           <a:xfrm>
-            <a:off x="4818431" y="6069513"/>
-            <a:ext cx="1443106" cy="192024"/>
+            <a:off x="5001311" y="6069513"/>
+            <a:ext cx="3454786" cy="192024"/>
           </a:xfrm>
           <a:prstGeom prst="rect">
             <a:avLst/>
@@ -10304,7 +10304,7 @@
           <a:noFill/>
         </p:spPr>
         <p:txBody>
-          <a:bodyPr wrap="square" lIns="0" rIns="0" tIns="0" bIns="0" anchor="ctr"/>
+          <a:bodyPr wrap="none" lIns="0" rIns="0" tIns="0" bIns="0" anchor="ctr"/>
           <a:lstStyle/>
           <a:p>
             <a:pPr algn="l">
@@ -10332,8 +10332,8 @@
         </p:nvSpPr>
         <p:spPr>
           <a:xfrm>
-            <a:off x="6298113" y="6069513"/>
-            <a:ext cx="1329995" cy="192024"/>
+            <a:off x="6480993" y="6069513"/>
+            <a:ext cx="3341675" cy="192024"/>
           </a:xfrm>
           <a:prstGeom prst="rect">
             <a:avLst/>
@@ -10341,7 +10341,7 @@
           <a:noFill/>
         </p:spPr>
         <p:txBody>
-          <a:bodyPr wrap="square" lIns="0" rIns="0" tIns="0" bIns="0" anchor="ctr"/>
+          <a:bodyPr wrap="none" lIns="0" rIns="0" tIns="0" bIns="0" anchor="ctr"/>
           <a:lstStyle/>
           <a:p>
             <a:pPr algn="l">
@@ -10370,7 +10370,7 @@
         <p:spPr>
           <a:xfrm>
             <a:off x="1769364" y="6342918"/>
-            <a:ext cx="367132" cy="102413"/>
+            <a:ext cx="2561692" cy="102413"/>
           </a:xfrm>
           <a:prstGeom prst="rect">
             <a:avLst/>
@@ -10378,7 +10378,7 @@
           <a:noFill/>
         </p:spPr>
         <p:txBody>
-          <a:bodyPr wrap="square" lIns="0" rIns="0" tIns="0" bIns="0" anchor="ctr"/>
+          <a:bodyPr wrap="none" lIns="0" rIns="0" tIns="0" bIns="0" anchor="ctr"/>
           <a:lstStyle/>
           <a:p>
             <a:pPr algn="l">
@@ -10406,8 +10406,8 @@
         </p:nvSpPr>
         <p:spPr>
           <a:xfrm>
-            <a:off x="2173072" y="6298113"/>
-            <a:ext cx="1548994" cy="192024"/>
+            <a:off x="2355952" y="6298113"/>
+            <a:ext cx="3560674" cy="192024"/>
           </a:xfrm>
           <a:prstGeom prst="rect">
             <a:avLst/>
@@ -10415,7 +10415,7 @@
           <a:noFill/>
         </p:spPr>
         <p:txBody>
-          <a:bodyPr wrap="square" lIns="0" rIns="0" tIns="0" bIns="0" anchor="ctr"/>
+          <a:bodyPr wrap="none" lIns="0" rIns="0" tIns="0" bIns="0" anchor="ctr"/>
           <a:lstStyle/>
           <a:p>
             <a:pPr algn="l">
@@ -10444,7 +10444,7 @@
         <p:spPr>
           <a:xfrm>
             <a:off x="3387303" y="6330117"/>
-            <a:ext cx="238750" cy="128016"/>
+            <a:ext cx="2433310" cy="128016"/>
           </a:xfrm>
           <a:prstGeom prst="rect">
             <a:avLst/>
@@ -10452,7 +10452,7 @@
           <a:noFill/>
         </p:spPr>
         <p:txBody>
-          <a:bodyPr wrap="square" lIns="0" rIns="0" tIns="0" bIns="0" anchor="ctr"/>
+          <a:bodyPr wrap="none" lIns="0" rIns="0" tIns="0" bIns="0" anchor="ctr"/>
           <a:lstStyle/>
           <a:p>
             <a:pPr algn="l">
@@ -10480,8 +10480,8 @@
         </p:nvSpPr>
         <p:spPr>
           <a:xfrm>
-            <a:off x="2254087" y="2912913"/>
-            <a:ext cx="422361" cy="123444"/>
+            <a:off x="1912010" y="2912913"/>
+            <a:ext cx="1096914" cy="123444"/>
           </a:xfrm>
           <a:prstGeom prst="rect">
             <a:avLst/>
@@ -10489,7 +10489,7 @@
           <a:noFill/>
         </p:spPr>
         <p:txBody>
-          <a:bodyPr wrap="square" lIns="0" rIns="0" tIns="0" bIns="0" anchor="ctr"/>
+          <a:bodyPr wrap="none" lIns="0" rIns="0" tIns="0" bIns="0" anchor="ctr"/>
           <a:lstStyle/>
           <a:p>
             <a:pPr algn="ctr">
@@ -10517,8 +10517,8 @@
         </p:nvSpPr>
         <p:spPr>
           <a:xfrm>
-            <a:off x="3433389" y="2912913"/>
-            <a:ext cx="601127" cy="123444"/>
+            <a:off x="3180740" y="2912913"/>
+            <a:ext cx="1096914" cy="123444"/>
           </a:xfrm>
           <a:prstGeom prst="rect">
             <a:avLst/>
@@ -10526,7 +10526,7 @@
           <a:noFill/>
         </p:spPr>
         <p:txBody>
-          <a:bodyPr wrap="square" lIns="0" rIns="0" tIns="0" bIns="0" anchor="ctr"/>
+          <a:bodyPr wrap="none" lIns="0" rIns="0" tIns="0" bIns="0" anchor="ctr"/>
           <a:lstStyle/>
           <a:p>
             <a:pPr algn="ctr">
@@ -10554,8 +10554,8 @@
         </p:nvSpPr>
         <p:spPr>
           <a:xfrm>
-            <a:off x="4887559" y="2912913"/>
-            <a:ext cx="230063" cy="123444"/>
+            <a:off x="4449379" y="2912913"/>
+            <a:ext cx="1096914" cy="123444"/>
           </a:xfrm>
           <a:prstGeom prst="rect">
             <a:avLst/>
@@ -10563,7 +10563,7 @@
           <a:noFill/>
         </p:spPr>
         <p:txBody>
-          <a:bodyPr wrap="square" lIns="0" rIns="0" tIns="0" bIns="0" anchor="ctr"/>
+          <a:bodyPr wrap="none" lIns="0" rIns="0" tIns="0" bIns="0" anchor="ctr"/>
           <a:lstStyle/>
           <a:p>
             <a:pPr algn="ctr">
@@ -10591,8 +10591,8 @@
         </p:nvSpPr>
         <p:spPr>
           <a:xfrm>
-            <a:off x="5950184" y="2912913"/>
-            <a:ext cx="642183" cy="123444"/>
+            <a:off x="5718018" y="2912913"/>
+            <a:ext cx="1096914" cy="123444"/>
           </a:xfrm>
           <a:prstGeom prst="rect">
             <a:avLst/>
@@ -10600,7 +10600,7 @@
           <a:noFill/>
         </p:spPr>
         <p:txBody>
-          <a:bodyPr wrap="square" lIns="0" rIns="0" tIns="0" bIns="0" anchor="ctr"/>
+          <a:bodyPr wrap="none" lIns="0" rIns="0" tIns="0" bIns="0" anchor="ctr"/>
           <a:lstStyle/>
           <a:p>
             <a:pPr algn="ctr">
@@ -10628,8 +10628,8 @@
         </p:nvSpPr>
         <p:spPr>
           <a:xfrm>
-            <a:off x="2281885" y="3294492"/>
-            <a:ext cx="366949" cy="123444"/>
+            <a:off x="1912010" y="3294492"/>
+            <a:ext cx="1096914" cy="123444"/>
           </a:xfrm>
           <a:prstGeom prst="rect">
             <a:avLst/>
@@ -10637,7 +10637,7 @@
           <a:noFill/>
         </p:spPr>
         <p:txBody>
-          <a:bodyPr wrap="square" lIns="0" rIns="0" tIns="0" bIns="0" anchor="ctr"/>
+          <a:bodyPr wrap="none" lIns="0" rIns="0" tIns="0" bIns="0" anchor="ctr"/>
           <a:lstStyle/>
           <a:p>
             <a:pPr algn="ctr">
@@ -10665,8 +10665,8 @@
         </p:nvSpPr>
         <p:spPr>
           <a:xfrm>
-            <a:off x="3387669" y="3294492"/>
-            <a:ext cx="692567" cy="123444"/>
+            <a:off x="3180740" y="3294492"/>
+            <a:ext cx="1096914" cy="123444"/>
           </a:xfrm>
           <a:prstGeom prst="rect">
             <a:avLst/>
@@ -10674,7 +10674,7 @@
           <a:noFill/>
         </p:spPr>
         <p:txBody>
-          <a:bodyPr wrap="square" lIns="0" rIns="0" tIns="0" bIns="0" anchor="ctr"/>
+          <a:bodyPr wrap="none" lIns="0" rIns="0" tIns="0" bIns="0" anchor="ctr"/>
           <a:lstStyle/>
           <a:p>
             <a:pPr algn="ctr">
@@ -10702,8 +10702,8 @@
         </p:nvSpPr>
         <p:spPr>
           <a:xfrm>
-            <a:off x="4649084" y="3294492"/>
-            <a:ext cx="706923" cy="123444"/>
+            <a:off x="4449379" y="3294492"/>
+            <a:ext cx="1096914" cy="123444"/>
           </a:xfrm>
           <a:prstGeom prst="rect">
             <a:avLst/>
@@ -10711,7 +10711,7 @@
           <a:noFill/>
         </p:spPr>
         <p:txBody>
-          <a:bodyPr wrap="square" lIns="0" rIns="0" tIns="0" bIns="0" anchor="ctr"/>
+          <a:bodyPr wrap="none" lIns="0" rIns="0" tIns="0" bIns="0" anchor="ctr"/>
           <a:lstStyle/>
           <a:p>
             <a:pPr algn="ctr">
@@ -10739,8 +10739,8 @@
         </p:nvSpPr>
         <p:spPr>
           <a:xfrm>
-            <a:off x="5880964" y="3294492"/>
-            <a:ext cx="780623" cy="123444"/>
+            <a:off x="5718018" y="3294492"/>
+            <a:ext cx="1096914" cy="123444"/>
           </a:xfrm>
           <a:prstGeom prst="rect">
             <a:avLst/>
@@ -10748,7 +10748,7 @@
           <a:noFill/>
         </p:spPr>
         <p:txBody>
-          <a:bodyPr wrap="square" lIns="0" rIns="0" tIns="0" bIns="0" anchor="ctr"/>
+          <a:bodyPr wrap="none" lIns="0" rIns="0" tIns="0" bIns="0" anchor="ctr"/>
           <a:lstStyle/>
           <a:p>
             <a:pPr algn="ctr">
